--- a/voidhunter_presentation.pptx
+++ b/voidhunter_presentation.pptx
@@ -215,7 +215,7 @@
           <a:p>
             <a:fld id="{F864B6C9-FAC1-4BC2-B3CC-22F49CB9BB39}" type="datetimeFigureOut">
               <a:rPr lang="ru-RU" smtClean="0"/>
-              <a:t>28.06.2026</a:t>
+              <a:t>29.06.2026</a:t>
             </a:fld>
             <a:endParaRPr lang="ru-RU"/>
           </a:p>
@@ -829,7 +829,7 @@
           <a:p>
             <a:fld id="{5BCAD085-E8A6-8845-BD4E-CB4CCA059FC4}" type="datetimeFigureOut">
               <a:rPr lang="en-US" smtClean="0"/>
-              <a:t>6/28/2026</a:t>
+              <a:t>6/29/2026</a:t>
             </a:fld>
             <a:endParaRPr lang="en-US"/>
           </a:p>
@@ -997,7 +997,7 @@
           <a:p>
             <a:fld id="{5BCAD085-E8A6-8845-BD4E-CB4CCA059FC4}" type="datetimeFigureOut">
               <a:rPr lang="en-US" smtClean="0"/>
-              <a:t>6/28/2026</a:t>
+              <a:t>6/29/2026</a:t>
             </a:fld>
             <a:endParaRPr lang="en-US"/>
           </a:p>
@@ -1175,7 +1175,7 @@
           <a:p>
             <a:fld id="{5BCAD085-E8A6-8845-BD4E-CB4CCA059FC4}" type="datetimeFigureOut">
               <a:rPr lang="en-US" smtClean="0"/>
-              <a:t>6/28/2026</a:t>
+              <a:t>6/29/2026</a:t>
             </a:fld>
             <a:endParaRPr lang="en-US"/>
           </a:p>
@@ -1343,7 +1343,7 @@
           <a:p>
             <a:fld id="{5BCAD085-E8A6-8845-BD4E-CB4CCA059FC4}" type="datetimeFigureOut">
               <a:rPr lang="en-US" smtClean="0"/>
-              <a:t>6/28/2026</a:t>
+              <a:t>6/29/2026</a:t>
             </a:fld>
             <a:endParaRPr lang="en-US"/>
           </a:p>
@@ -1588,7 +1588,7 @@
           <a:p>
             <a:fld id="{5BCAD085-E8A6-8845-BD4E-CB4CCA059FC4}" type="datetimeFigureOut">
               <a:rPr lang="en-US" smtClean="0"/>
-              <a:t>6/28/2026</a:t>
+              <a:t>6/29/2026</a:t>
             </a:fld>
             <a:endParaRPr lang="en-US"/>
           </a:p>
@@ -1873,7 +1873,7 @@
           <a:p>
             <a:fld id="{5BCAD085-E8A6-8845-BD4E-CB4CCA059FC4}" type="datetimeFigureOut">
               <a:rPr lang="en-US" smtClean="0"/>
-              <a:t>6/28/2026</a:t>
+              <a:t>6/29/2026</a:t>
             </a:fld>
             <a:endParaRPr lang="en-US"/>
           </a:p>
@@ -2292,7 +2292,7 @@
           <a:p>
             <a:fld id="{5BCAD085-E8A6-8845-BD4E-CB4CCA059FC4}" type="datetimeFigureOut">
               <a:rPr lang="en-US" smtClean="0"/>
-              <a:t>6/28/2026</a:t>
+              <a:t>6/29/2026</a:t>
             </a:fld>
             <a:endParaRPr lang="en-US"/>
           </a:p>
@@ -2409,7 +2409,7 @@
           <a:p>
             <a:fld id="{5BCAD085-E8A6-8845-BD4E-CB4CCA059FC4}" type="datetimeFigureOut">
               <a:rPr lang="en-US" smtClean="0"/>
-              <a:t>6/28/2026</a:t>
+              <a:t>6/29/2026</a:t>
             </a:fld>
             <a:endParaRPr lang="en-US"/>
           </a:p>
@@ -2504,7 +2504,7 @@
           <a:p>
             <a:fld id="{5BCAD085-E8A6-8845-BD4E-CB4CCA059FC4}" type="datetimeFigureOut">
               <a:rPr lang="en-US" smtClean="0"/>
-              <a:t>6/28/2026</a:t>
+              <a:t>6/29/2026</a:t>
             </a:fld>
             <a:endParaRPr lang="en-US"/>
           </a:p>
@@ -2779,7 +2779,7 @@
           <a:p>
             <a:fld id="{5BCAD085-E8A6-8845-BD4E-CB4CCA059FC4}" type="datetimeFigureOut">
               <a:rPr lang="en-US" smtClean="0"/>
-              <a:t>6/28/2026</a:t>
+              <a:t>6/29/2026</a:t>
             </a:fld>
             <a:endParaRPr lang="en-US"/>
           </a:p>
@@ -3031,7 +3031,7 @@
           <a:p>
             <a:fld id="{5BCAD085-E8A6-8845-BD4E-CB4CCA059FC4}" type="datetimeFigureOut">
               <a:rPr lang="en-US" smtClean="0"/>
-              <a:t>6/28/2026</a:t>
+              <a:t>6/29/2026</a:t>
             </a:fld>
             <a:endParaRPr lang="en-US"/>
           </a:p>
@@ -3242,7 +3242,7 @@
           <a:p>
             <a:fld id="{5BCAD085-E8A6-8845-BD4E-CB4CCA059FC4}" type="datetimeFigureOut">
               <a:rPr lang="en-US" smtClean="0"/>
-              <a:t>6/28/2026</a:t>
+              <a:t>6/29/2026</a:t>
             </a:fld>
             <a:endParaRPr lang="en-US"/>
           </a:p>
@@ -6774,7 +6774,7 @@
         <p:spPr>
           <a:xfrm>
             <a:off x="5303520" y="1828800"/>
-            <a:ext cx="6126480" cy="3931920"/>
+            <a:ext cx="6126480" cy="3883114"/>
           </a:xfrm>
           <a:prstGeom prst="rect">
             <a:avLst/>
@@ -6799,8 +6799,26 @@
               </a:defRPr>
             </a:pPr>
             <a:r>
-              <a:t>Механика сбора и риска</a:t>
-            </a:r>
+              <a:rPr dirty="0" err="1"/>
+              <a:t>Механика</a:t>
+            </a:r>
+            <a:r>
+              <a:rPr dirty="0"/>
+              <a:t> </a:t>
+            </a:r>
+            <a:r>
+              <a:rPr dirty="0" err="1"/>
+              <a:t>сбора</a:t>
+            </a:r>
+            <a:r>
+              <a:rPr dirty="0"/>
+              <a:t> и </a:t>
+            </a:r>
+            <a:r>
+              <a:rPr dirty="0" err="1"/>
+              <a:t>риска</a:t>
+            </a:r>
+            <a:endParaRPr dirty="0"/>
           </a:p>
           <a:p>
             <a:pPr>
@@ -6815,7 +6833,24 @@
               </a:defRPr>
             </a:pPr>
             <a:r>
-              <a:t>✔ Шанс выпадения 50%:</a:t>
+              <a:rPr dirty="0"/>
+              <a:t>✔ </a:t>
+            </a:r>
+            <a:r>
+              <a:rPr dirty="0" err="1"/>
+              <a:t>Шанс</a:t>
+            </a:r>
+            <a:r>
+              <a:rPr dirty="0"/>
+              <a:t> </a:t>
+            </a:r>
+            <a:r>
+              <a:rPr dirty="0" err="1"/>
+              <a:t>выпадения</a:t>
+            </a:r>
+            <a:r>
+              <a:rPr dirty="0"/>
+              <a:t> 50%:</a:t>
             </a:r>
           </a:p>
           <a:p>
@@ -6831,7 +6866,124 @@
               </a:defRPr>
             </a:pPr>
             <a:r>
-              <a:t>Каждый уничтоженный враг (как дрон, так и метеорит) имеет вероятность оставить после себя фиолетовое ядро VoidCore.</a:t>
+              <a:rPr dirty="0" err="1"/>
+              <a:t>Каждый</a:t>
+            </a:r>
+            <a:r>
+              <a:rPr dirty="0"/>
+              <a:t> </a:t>
+            </a:r>
+            <a:r>
+              <a:rPr dirty="0" err="1"/>
+              <a:t>уничтоженный</a:t>
+            </a:r>
+            <a:r>
+              <a:rPr dirty="0"/>
+              <a:t> </a:t>
+            </a:r>
+            <a:r>
+              <a:rPr dirty="0" err="1"/>
+              <a:t>враг</a:t>
+            </a:r>
+            <a:r>
+              <a:rPr dirty="0"/>
+              <a:t> (</a:t>
+            </a:r>
+            <a:r>
+              <a:rPr dirty="0" err="1"/>
+              <a:t>как</a:t>
+            </a:r>
+            <a:r>
+              <a:rPr dirty="0"/>
+              <a:t> </a:t>
+            </a:r>
+            <a:r>
+              <a:rPr dirty="0" err="1"/>
+              <a:t>дрон</a:t>
+            </a:r>
+            <a:r>
+              <a:rPr dirty="0"/>
+              <a:t>, </a:t>
+            </a:r>
+            <a:r>
+              <a:rPr dirty="0" err="1"/>
+              <a:t>так</a:t>
+            </a:r>
+            <a:r>
+              <a:rPr dirty="0"/>
+              <a:t> и </a:t>
+            </a:r>
+            <a:r>
+              <a:rPr dirty="0" err="1"/>
+              <a:t>метеорит</a:t>
+            </a:r>
+            <a:r>
+              <a:rPr dirty="0"/>
+              <a:t>) </a:t>
+            </a:r>
+            <a:r>
+              <a:rPr dirty="0" err="1"/>
+              <a:t>имеет</a:t>
+            </a:r>
+            <a:r>
+              <a:rPr dirty="0"/>
+              <a:t> </a:t>
+            </a:r>
+            <a:r>
+              <a:rPr dirty="0" err="1"/>
+              <a:t>вероятность</a:t>
+            </a:r>
+            <a:r>
+              <a:rPr dirty="0"/>
+              <a:t> </a:t>
+            </a:r>
+            <a:r>
+              <a:rPr dirty="0" err="1"/>
+              <a:t>оставить</a:t>
+            </a:r>
+            <a:r>
+              <a:rPr dirty="0"/>
+              <a:t> </a:t>
+            </a:r>
+            <a:r>
+              <a:rPr dirty="0" err="1"/>
+              <a:t>после</a:t>
+            </a:r>
+            <a:r>
+              <a:rPr dirty="0"/>
+              <a:t> </a:t>
+            </a:r>
+            <a:r>
+              <a:rPr dirty="0" err="1"/>
+              <a:t>себя</a:t>
+            </a:r>
+            <a:r>
+              <a:rPr dirty="0"/>
+              <a:t> </a:t>
+            </a:r>
+            <a:r>
+              <a:rPr dirty="0" err="1"/>
+              <a:t>фиолетовое</a:t>
+            </a:r>
+            <a:r>
+              <a:rPr dirty="0"/>
+              <a:t> </a:t>
+            </a:r>
+            <a:r>
+              <a:rPr dirty="0" err="1"/>
+              <a:t>ядро</a:t>
+            </a:r>
+            <a:r>
+              <a:rPr dirty="0"/>
+              <a:t> </a:t>
+            </a:r>
+            <a:r>
+              <a:rPr dirty="0" err="1"/>
+              <a:t>VoidCore</a:t>
+            </a:r>
+            <a:r>
+              <a:rPr dirty="0"/>
+              <a:t>.</a:t>
             </a:r>
           </a:p>
           <a:p>
@@ -6847,7 +6999,24 @@
               </a:defRPr>
             </a:pPr>
             <a:r>
-              <a:t>✔ Риск и Награда:</a:t>
+              <a:rPr dirty="0"/>
+              <a:t>✔ </a:t>
+            </a:r>
+            <a:r>
+              <a:rPr dirty="0" err="1"/>
+              <a:t>Риск</a:t>
+            </a:r>
+            <a:r>
+              <a:rPr dirty="0"/>
+              <a:t> и </a:t>
+            </a:r>
+            <a:r>
+              <a:rPr dirty="0" err="1"/>
+              <a:t>Награда</a:t>
+            </a:r>
+            <a:r>
+              <a:rPr dirty="0"/>
+              <a:t>:</a:t>
             </a:r>
           </a:p>
           <a:p>
@@ -6863,7 +7032,188 @@
               </a:defRPr>
             </a:pPr>
             <a:r>
-              <a:t>Ядра выпадают в точках гибели врагов, часто прямо на линии огня или спавна новых угроз. Чтобы подбирать их, игроку нужно постоянно двигаться в опасные зоны.</a:t>
+              <a:rPr dirty="0" err="1"/>
+              <a:t>Ядра</a:t>
+            </a:r>
+            <a:r>
+              <a:rPr dirty="0"/>
+              <a:t> </a:t>
+            </a:r>
+            <a:r>
+              <a:rPr dirty="0" err="1"/>
+              <a:t>выпадают</a:t>
+            </a:r>
+            <a:r>
+              <a:rPr dirty="0"/>
+              <a:t> в </a:t>
+            </a:r>
+            <a:r>
+              <a:rPr dirty="0" err="1"/>
+              <a:t>точках</a:t>
+            </a:r>
+            <a:r>
+              <a:rPr dirty="0"/>
+              <a:t> </a:t>
+            </a:r>
+            <a:r>
+              <a:rPr dirty="0" err="1"/>
+              <a:t>гибели</a:t>
+            </a:r>
+            <a:r>
+              <a:rPr dirty="0"/>
+              <a:t> </a:t>
+            </a:r>
+            <a:r>
+              <a:rPr dirty="0" err="1"/>
+              <a:t>врагов</a:t>
+            </a:r>
+            <a:r>
+              <a:rPr dirty="0"/>
+              <a:t>, </a:t>
+            </a:r>
+            <a:r>
+              <a:rPr dirty="0" err="1"/>
+              <a:t>часто</a:t>
+            </a:r>
+            <a:r>
+              <a:rPr dirty="0"/>
+              <a:t> </a:t>
+            </a:r>
+            <a:r>
+              <a:rPr dirty="0" err="1"/>
+              <a:t>прямо</a:t>
+            </a:r>
+            <a:r>
+              <a:rPr dirty="0"/>
+              <a:t> </a:t>
+            </a:r>
+            <a:r>
+              <a:rPr dirty="0" err="1"/>
+              <a:t>на</a:t>
+            </a:r>
+            <a:r>
+              <a:rPr dirty="0"/>
+              <a:t> </a:t>
+            </a:r>
+            <a:r>
+              <a:rPr dirty="0" err="1"/>
+              <a:t>линии</a:t>
+            </a:r>
+            <a:r>
+              <a:rPr dirty="0"/>
+              <a:t> </a:t>
+            </a:r>
+            <a:r>
+              <a:rPr dirty="0" err="1"/>
+              <a:t>огня</a:t>
+            </a:r>
+            <a:r>
+              <a:rPr dirty="0"/>
+              <a:t> </a:t>
+            </a:r>
+            <a:r>
+              <a:rPr dirty="0" err="1"/>
+              <a:t>или</a:t>
+            </a:r>
+            <a:r>
+              <a:rPr dirty="0"/>
+              <a:t> </a:t>
+            </a:r>
+            <a:r>
+              <a:rPr dirty="0" err="1"/>
+              <a:t>спавна</a:t>
+            </a:r>
+            <a:r>
+              <a:rPr dirty="0"/>
+              <a:t> </a:t>
+            </a:r>
+            <a:r>
+              <a:rPr dirty="0" err="1"/>
+              <a:t>новых</a:t>
+            </a:r>
+            <a:r>
+              <a:rPr dirty="0"/>
+              <a:t> </a:t>
+            </a:r>
+            <a:r>
+              <a:rPr dirty="0" err="1"/>
+              <a:t>угроз</a:t>
+            </a:r>
+            <a:r>
+              <a:rPr dirty="0"/>
+              <a:t>. </a:t>
+            </a:r>
+            <a:r>
+              <a:rPr dirty="0" err="1"/>
+              <a:t>Чтобы</a:t>
+            </a:r>
+            <a:r>
+              <a:rPr dirty="0"/>
+              <a:t> </a:t>
+            </a:r>
+            <a:r>
+              <a:rPr dirty="0" err="1"/>
+              <a:t>подбирать</a:t>
+            </a:r>
+            <a:r>
+              <a:rPr dirty="0"/>
+              <a:t> </a:t>
+            </a:r>
+            <a:r>
+              <a:rPr dirty="0" err="1"/>
+              <a:t>их</a:t>
+            </a:r>
+            <a:r>
+              <a:rPr dirty="0"/>
+              <a:t>, </a:t>
+            </a:r>
+            <a:r>
+              <a:rPr dirty="0" err="1"/>
+              <a:t>игроку</a:t>
+            </a:r>
+            <a:r>
+              <a:rPr dirty="0"/>
+              <a:t> </a:t>
+            </a:r>
+            <a:r>
+              <a:rPr dirty="0" err="1"/>
+              <a:t>нужно</a:t>
+            </a:r>
+            <a:r>
+              <a:rPr dirty="0"/>
+              <a:t> </a:t>
+            </a:r>
+            <a:r>
+              <a:rPr dirty="0" err="1"/>
+              <a:t>постоянно</a:t>
+            </a:r>
+            <a:r>
+              <a:rPr dirty="0"/>
+              <a:t> </a:t>
+            </a:r>
+            <a:r>
+              <a:rPr dirty="0" err="1"/>
+              <a:t>двигаться</a:t>
+            </a:r>
+            <a:r>
+              <a:rPr dirty="0"/>
+              <a:t> в </a:t>
+            </a:r>
+            <a:r>
+              <a:rPr dirty="0" err="1"/>
+              <a:t>опасные</a:t>
+            </a:r>
+            <a:r>
+              <a:rPr dirty="0"/>
+              <a:t> </a:t>
+            </a:r>
+            <a:r>
+              <a:rPr dirty="0" err="1"/>
+              <a:t>зоны</a:t>
+            </a:r>
+            <a:r>
+              <a:rPr dirty="0"/>
+              <a:t>.</a:t>
             </a:r>
           </a:p>
           <a:p>
@@ -6879,7 +7229,24 @@
               </a:defRPr>
             </a:pPr>
             <a:r>
-              <a:t>✔ Механика автопритяжения:</a:t>
+              <a:rPr dirty="0"/>
+              <a:t>✔ </a:t>
+            </a:r>
+            <a:r>
+              <a:rPr dirty="0" err="1"/>
+              <a:t>Механика</a:t>
+            </a:r>
+            <a:r>
+              <a:rPr dirty="0"/>
+              <a:t> </a:t>
+            </a:r>
+            <a:r>
+              <a:rPr dirty="0" err="1"/>
+              <a:t>автопритяжения</a:t>
+            </a:r>
+            <a:r>
+              <a:rPr dirty="0"/>
+              <a:t>:</a:t>
             </a:r>
           </a:p>
           <a:p>
@@ -6895,7 +7262,124 @@
               </a:defRPr>
             </a:pPr>
             <a:r>
-              <a:t>Для удобства геймплея у корабля игрока есть небольшой радиус сбора: ядра плавно притягиваются к кораблю при сближении.</a:t>
+              <a:rPr dirty="0" err="1"/>
+              <a:t>Для</a:t>
+            </a:r>
+            <a:r>
+              <a:rPr dirty="0"/>
+              <a:t> </a:t>
+            </a:r>
+            <a:r>
+              <a:rPr dirty="0" err="1"/>
+              <a:t>удобства</a:t>
+            </a:r>
+            <a:r>
+              <a:rPr dirty="0"/>
+              <a:t> </a:t>
+            </a:r>
+            <a:r>
+              <a:rPr dirty="0" err="1"/>
+              <a:t>геймплея</a:t>
+            </a:r>
+            <a:r>
+              <a:rPr dirty="0"/>
+              <a:t> у </a:t>
+            </a:r>
+            <a:r>
+              <a:rPr dirty="0" err="1"/>
+              <a:t>корабля</a:t>
+            </a:r>
+            <a:r>
+              <a:rPr dirty="0"/>
+              <a:t> </a:t>
+            </a:r>
+            <a:r>
+              <a:rPr dirty="0" err="1"/>
+              <a:t>игрока</a:t>
+            </a:r>
+            <a:r>
+              <a:rPr dirty="0"/>
+              <a:t> </a:t>
+            </a:r>
+            <a:r>
+              <a:rPr dirty="0" err="1"/>
+              <a:t>есть</a:t>
+            </a:r>
+            <a:r>
+              <a:rPr dirty="0"/>
+              <a:t> </a:t>
+            </a:r>
+            <a:r>
+              <a:rPr dirty="0" err="1"/>
+              <a:t>небольшой</a:t>
+            </a:r>
+            <a:r>
+              <a:rPr dirty="0"/>
+              <a:t> </a:t>
+            </a:r>
+            <a:r>
+              <a:rPr dirty="0" err="1"/>
+              <a:t>радиус</a:t>
+            </a:r>
+            <a:r>
+              <a:rPr dirty="0"/>
+              <a:t> </a:t>
+            </a:r>
+            <a:r>
+              <a:rPr dirty="0" err="1"/>
+              <a:t>сбора</a:t>
+            </a:r>
+            <a:r>
+              <a:rPr dirty="0"/>
+              <a:t>: </a:t>
+            </a:r>
+            <a:r>
+              <a:rPr dirty="0" err="1"/>
+              <a:t>ядра</a:t>
+            </a:r>
+            <a:r>
+              <a:rPr dirty="0"/>
+              <a:t> </a:t>
+            </a:r>
+            <a:r>
+              <a:rPr dirty="0" err="1"/>
+              <a:t>плавно</a:t>
+            </a:r>
+            <a:r>
+              <a:rPr dirty="0"/>
+              <a:t> </a:t>
+            </a:r>
+            <a:r>
+              <a:rPr dirty="0" err="1"/>
+              <a:t>притягиваются</a:t>
+            </a:r>
+            <a:r>
+              <a:rPr dirty="0"/>
+              <a:t> к </a:t>
+            </a:r>
+            <a:r>
+              <a:rPr dirty="0" err="1"/>
+              <a:t>кораблю</a:t>
+            </a:r>
+            <a:r>
+              <a:rPr dirty="0"/>
+              <a:t> </a:t>
+            </a:r>
+            <a:r>
+              <a:rPr dirty="0" err="1"/>
+              <a:t>при</a:t>
+            </a:r>
+            <a:r>
+              <a:rPr dirty="0"/>
+              <a:t> </a:t>
+            </a:r>
+            <a:r>
+              <a:rPr dirty="0" err="1"/>
+              <a:t>сближении</a:t>
+            </a:r>
+            <a:r>
+              <a:rPr dirty="0"/>
+              <a:t>.</a:t>
             </a:r>
           </a:p>
           <a:p>
@@ -6911,7 +7395,24 @@
               </a:defRPr>
             </a:pPr>
             <a:r>
-              <a:t>✔ Счетчик и Улучшения:</a:t>
+              <a:rPr dirty="0"/>
+              <a:t>✔ </a:t>
+            </a:r>
+            <a:r>
+              <a:rPr dirty="0" err="1"/>
+              <a:t>Счетчик</a:t>
+            </a:r>
+            <a:r>
+              <a:rPr dirty="0"/>
+              <a:t> и </a:t>
+            </a:r>
+            <a:r>
+              <a:rPr dirty="0" err="1"/>
+              <a:t>Улучшения</a:t>
+            </a:r>
+            <a:r>
+              <a:rPr dirty="0"/>
+              <a:t>:</a:t>
             </a:r>
           </a:p>
           <a:p>
@@ -6927,8 +7428,58 @@
               </a:defRPr>
             </a:pPr>
             <a:r>
-              <a:t>Количество собранных VoidCore отображается на игровом UI и служит валютой улучшения боевых характеристик корабля.</a:t>
-            </a:r>
+              <a:rPr dirty="0" err="1"/>
+              <a:t>Количество</a:t>
+            </a:r>
+            <a:r>
+              <a:rPr dirty="0"/>
+              <a:t> </a:t>
+            </a:r>
+            <a:r>
+              <a:rPr dirty="0" err="1"/>
+              <a:t>собранных</a:t>
+            </a:r>
+            <a:r>
+              <a:rPr dirty="0"/>
+              <a:t> </a:t>
+            </a:r>
+            <a:r>
+              <a:rPr dirty="0" err="1"/>
+              <a:t>VoidCore</a:t>
+            </a:r>
+            <a:r>
+              <a:rPr dirty="0"/>
+              <a:t> </a:t>
+            </a:r>
+            <a:r>
+              <a:rPr dirty="0" err="1"/>
+              <a:t>отображается</a:t>
+            </a:r>
+            <a:r>
+              <a:rPr dirty="0"/>
+              <a:t> </a:t>
+            </a:r>
+            <a:r>
+              <a:rPr dirty="0" err="1"/>
+              <a:t>на</a:t>
+            </a:r>
+            <a:r>
+              <a:rPr dirty="0"/>
+              <a:t> </a:t>
+            </a:r>
+            <a:r>
+              <a:rPr dirty="0" err="1"/>
+              <a:t>игровом</a:t>
+            </a:r>
+            <a:r>
+              <a:rPr dirty="0"/>
+              <a:t> UI и </a:t>
+            </a:r>
+            <a:r>
+              <a:rPr lang="ru-RU" dirty="0"/>
+              <a:t>увеличивают урон игрока</a:t>
+            </a:r>
+            <a:endParaRPr dirty="0"/>
           </a:p>
         </p:txBody>
       </p:sp>

--- a/voidhunter_presentation.pptx
+++ b/voidhunter_presentation.pptx
@@ -6116,47 +6116,6 @@
             </a:r>
             <a:r>
               <a:rPr dirty="0" err="1"/>
-              <a:t>Наносимый</a:t>
-            </a:r>
-            <a:r>
-              <a:rPr dirty="0"/>
-              <a:t> </a:t>
-            </a:r>
-            <a:r>
-              <a:rPr dirty="0" err="1"/>
-              <a:t>урон</a:t>
-            </a:r>
-            <a:r>
-              <a:rPr dirty="0"/>
-              <a:t>: 1 </a:t>
-            </a:r>
-            <a:r>
-              <a:rPr dirty="0" err="1"/>
-              <a:t>ед</a:t>
-            </a:r>
-            <a:r>
-              <a:rPr dirty="0"/>
-              <a:t>.</a:t>
-            </a:r>
-          </a:p>
-          <a:p>
-            <a:pPr>
-              <a:spcAft>
-                <a:spcPts val="400"/>
-              </a:spcAft>
-              <a:defRPr sz="1300">
-                <a:solidFill>
-                  <a:srgbClr val="9696A5"/>
-                </a:solidFill>
-                <a:latin typeface="Arial"/>
-              </a:defRPr>
-            </a:pPr>
-            <a:r>
-              <a:rPr dirty="0"/>
-              <a:t>• </a:t>
-            </a:r>
-            <a:r>
-              <a:rPr dirty="0" err="1"/>
               <a:t>Очки</a:t>
             </a:r>
             <a:r>
@@ -6364,47 +6323,6 @@
             <a:r>
               <a:rPr dirty="0"/>
               <a:t>)</a:t>
-            </a:r>
-          </a:p>
-          <a:p>
-            <a:pPr>
-              <a:spcAft>
-                <a:spcPts val="400"/>
-              </a:spcAft>
-              <a:defRPr sz="1300">
-                <a:solidFill>
-                  <a:srgbClr val="9696A5"/>
-                </a:solidFill>
-                <a:latin typeface="Arial"/>
-              </a:defRPr>
-            </a:pPr>
-            <a:r>
-              <a:rPr dirty="0"/>
-              <a:t>• </a:t>
-            </a:r>
-            <a:r>
-              <a:rPr dirty="0" err="1"/>
-              <a:t>Наносимый</a:t>
-            </a:r>
-            <a:r>
-              <a:rPr dirty="0"/>
-              <a:t> </a:t>
-            </a:r>
-            <a:r>
-              <a:rPr dirty="0" err="1"/>
-              <a:t>урон</a:t>
-            </a:r>
-            <a:r>
-              <a:rPr dirty="0"/>
-              <a:t>: 2 </a:t>
-            </a:r>
-            <a:r>
-              <a:rPr dirty="0" err="1"/>
-              <a:t>ед</a:t>
-            </a:r>
-            <a:r>
-              <a:rPr dirty="0"/>
-              <a:t>. </a:t>
             </a:r>
           </a:p>
           <a:p>
